--- a/dist/초4/사회·역사/지역사와유산/초4_사회·역사_지역사와유산_01_지역의문화유산_학생용.pptx
+++ b/dist/초4/사회·역사/지역사와유산/초4_사회·역사_지역사와유산_01_지역의문화유산_학생용.pptx
@@ -120,13 +120,13 @@
   <p:extLst>
     <p:ext uri="{521415D9-36F7-43E2-AB2F-B90AF26B5E84}">
       <p14:sectionLst xmlns:p14="http://schemas.microsoft.com/office/powerpoint/2010/main">
-        <p14:section name="도입" id="{e26903c6-5b19-6957-5026-75991684c684}">
+        <p14:section name="도입" id="{0a56539a-b34b-9702-1ffc-6c707f0994e3}">
           <p14:sldIdLst>
             <p14:sldId id="256"/>
             <p14:sldId id="257"/>
           </p14:sldIdLst>
         </p14:section>
-        <p14:section name="개념" id="{c50e84b4-a8e7-90e6-3c89-348632b278e4}">
+        <p14:section name="개념" id="{884c9987-219e-bb4b-4aa3-ecf0b57c74a5}">
           <p14:sldIdLst>
             <p14:sldId id="258"/>
             <p14:sldId id="259"/>
@@ -134,7 +134,7 @@
             <p14:sldId id="263"/>
           </p14:sldIdLst>
         </p14:section>
-        <p14:section name="연습" id="{963a1464-df56-4a13-e0e8-985e575194e7}">
+        <p14:section name="연습" id="{bcd5cca0-4c24-c0d8-21e8-bd07a701166c}">
           <p14:sldIdLst>
             <p14:sldId id="260"/>
             <p14:sldId id="261"/>
@@ -142,24 +142,24 @@
             <p14:sldId id="265"/>
           </p14:sldIdLst>
         </p14:section>
-        <p14:section name="개념" id="{9d118165-03ec-037c-6462-2e4eb5b7388c}">
+        <p14:section name="개념" id="{11b609e5-f684-cce6-7f57-284cbb8ad790}">
           <p14:sldIdLst/>
         </p14:section>
-        <p14:section name="연습" id="{6c869762-7c31-56f8-4579-fc7301e04725}">
+        <p14:section name="연습" id="{ec0217b3-bc6a-ad16-99f0-61b4e69f5fdb}">
           <p14:sldIdLst/>
         </p14:section>
-        <p14:section name="확인" id="{2a4c8048-dc05-eb40-7e35-38fc5b60aa62}">
+        <p14:section name="확인" id="{9fb3bb70-536a-c9b2-31cc-ab4a8aa4cd01}">
           <p14:sldIdLst>
             <p14:sldId id="266"/>
             <p14:sldId id="267"/>
           </p14:sldIdLst>
         </p14:section>
-        <p14:section name="정리" id="{ca776daa-b11a-a1f1-3936-41b0c9c1c1a0}">
+        <p14:section name="정리" id="{f34aed75-c28b-0cd6-d30c-b4c6cdcb9ff3}">
           <p14:sldIdLst>
             <p14:sldId id="268"/>
           </p14:sldIdLst>
         </p14:section>
-        <p14:section name="보충" id="{854fa9de-d541-bb58-3756-4e59ca81023c}">
+        <p14:section name="보충" id="{e86e90c6-a50f-e4c1-b4d0-c59bb99b3516}">
           <p14:sldIdLst>
             <p14:sldId id="269"/>
           </p14:sldIdLst>
